--- a/assets/pptx/catalog-230.pptx
+++ b/assets/pptx/catalog-230.pptx
@@ -3525,7 +3525,7 @@
                 <a:ea typeface="Ebrima"/>
                 <a:cs typeface="Ebrima"/>
               </a:rPr>
-              <a:t>በህዝብህ ሞገስ አስበን (4x)</a:t>
+              <a:t>በህዝብህ ሞገስ አስበን 4x</a:t>
             </a:r>
           </a:p>
           <a:p>
@@ -3543,7 +3543,7 @@
                 <a:ea typeface="Ebrima"/>
                 <a:cs typeface="Ebrima"/>
               </a:rPr>
-              <a:t>በህዝብህ ሞገስ አስበን (4x)</a:t>
+              <a:t>በህዝብህ ሞገስ አስበን 4x</a:t>
             </a:r>
           </a:p>
         </p:txBody>
@@ -3803,7 +3803,7 @@
                 <a:ea typeface="Ebrima"/>
                 <a:cs typeface="Ebrima"/>
               </a:rPr>
-              <a:t>በህዝብህ ሞገስ አስበን (4x)</a:t>
+              <a:t>በህዝብህ ሞገስ አስበን 4x</a:t>
             </a:r>
           </a:p>
           <a:p>
@@ -3821,7 +3821,7 @@
                 <a:ea typeface="Ebrima"/>
                 <a:cs typeface="Ebrima"/>
               </a:rPr>
-              <a:t>በህዝብህ ሞገስ አስበን (4x)</a:t>
+              <a:t>በህዝብህ ሞገስ አስበን 4x</a:t>
             </a:r>
           </a:p>
         </p:txBody>
@@ -4081,7 +4081,7 @@
                 <a:ea typeface="Ebrima"/>
                 <a:cs typeface="Ebrima"/>
               </a:rPr>
-              <a:t>በህዝብህ ሞገስ አስበን (4x)</a:t>
+              <a:t>በህዝብህ ሞገስ አስበን 4x</a:t>
             </a:r>
           </a:p>
           <a:p>
@@ -4099,7 +4099,7 @@
                 <a:ea typeface="Ebrima"/>
                 <a:cs typeface="Ebrima"/>
               </a:rPr>
-              <a:t>በህዝብህ ሞገስ አስበን (4x)</a:t>
+              <a:t>በህዝብህ ሞገስ አስበን 4x</a:t>
             </a:r>
           </a:p>
         </p:txBody>
